--- a/slides/Finished/07-commanding-agent.pptx
+++ b/slides/Finished/07-commanding-agent.pptx
@@ -20673,7 +20673,7 @@
                 </a:solidFill>
                 <a:latin typeface="Calibri"/>
               </a:rPr>
-              <a:t>This is the payoff for Terminal Basics. Every command students learned — pwd, ls, cd, mkdir, mv — is what the agent runs in their filesystem. Vocabulary drifts in the wild (Anthropic says 'model + tools + orchestration layer'); same concepts.</a:t>
+              <a:t>This is the payoff for Module 5 (Know the Terrain). Every command students learned — pwd, ls, cd, mkdir, mv — is what the agent runs in their filesystem. Vocabulary drifts in the wild (Anthropic says 'model + tools + orchestration layer'); same concepts.</a:t>
             </a:r>
           </a:p>
         </p:txBody>
